--- a/Lectures/Lecture22-Wrapup.pptx
+++ b/Lectures/Lecture22-Wrapup.pptx
@@ -5,7 +5,7 @@
     <p:sldMasterId id="2147483648" r:id="rId1"/>
   </p:sldMasterIdLst>
   <p:notesMasterIdLst>
-    <p:notesMasterId r:id="rId24"/>
+    <p:notesMasterId r:id="rId25"/>
   </p:notesMasterIdLst>
   <p:sldIdLst>
     <p:sldId id="256" r:id="rId2"/>
@@ -20,16 +20,17 @@
     <p:sldId id="613" r:id="rId11"/>
     <p:sldId id="614" r:id="rId12"/>
     <p:sldId id="611" r:id="rId13"/>
-    <p:sldId id="258" r:id="rId14"/>
-    <p:sldId id="505" r:id="rId15"/>
-    <p:sldId id="547" r:id="rId16"/>
-    <p:sldId id="428" r:id="rId17"/>
-    <p:sldId id="263" r:id="rId18"/>
-    <p:sldId id="474" r:id="rId19"/>
-    <p:sldId id="620" r:id="rId20"/>
-    <p:sldId id="619" r:id="rId21"/>
-    <p:sldId id="604" r:id="rId22"/>
-    <p:sldId id="605" r:id="rId23"/>
+    <p:sldId id="621" r:id="rId14"/>
+    <p:sldId id="258" r:id="rId15"/>
+    <p:sldId id="505" r:id="rId16"/>
+    <p:sldId id="547" r:id="rId17"/>
+    <p:sldId id="428" r:id="rId18"/>
+    <p:sldId id="263" r:id="rId19"/>
+    <p:sldId id="474" r:id="rId20"/>
+    <p:sldId id="620" r:id="rId21"/>
+    <p:sldId id="619" r:id="rId22"/>
+    <p:sldId id="604" r:id="rId23"/>
+    <p:sldId id="605" r:id="rId24"/>
   </p:sldIdLst>
   <p:sldSz cx="12192000" cy="6858000"/>
   <p:notesSz cx="6858000" cy="9144000"/>
@@ -267,7 +268,7 @@
       <p15:sldGuideLst xmlns:p15="http://schemas.microsoft.com/office/powerpoint/2012/main"/>
     </p:ext>
     <p:ext uri="http://customooxmlschemas.google.com/">
-      <go:slidesCustomData xmlns:go="http://customooxmlschemas.google.com/" xmlns:p15="http://schemas.microsoft.com/office/powerpoint/2012/main" xmlns:p14="http://schemas.microsoft.com/office/powerpoint/2010/main" xmlns:com="http://schemas.openxmlformats.org/drawingml/2006/compatibility" xmlns:pvml="urn:schemas-microsoft-com:office:powerpoint" xmlns:v="urn:schemas-microsoft-com:vml" xmlns:o="urn:schemas-microsoft-com:office:office" xmlns:dgm="http://schemas.openxmlformats.org/drawingml/2006/diagram" xmlns:c="http://schemas.openxmlformats.org/drawingml/2006/chart" xmlns:mv="urn:schemas-microsoft-com:mac:vml" xmlns:mc="http://schemas.openxmlformats.org/markup-compatibility/2006" xmlns="" r:id="rId39" roundtripDataSignature="AMtx7mgWqGpmJnm2LhSO/E7EgiMMs26KqA=="/>
+      <go:slidesCustomData xmlns="" xmlns:mc="http://schemas.openxmlformats.org/markup-compatibility/2006" xmlns:mv="urn:schemas-microsoft-com:mac:vml" xmlns:c="http://schemas.openxmlformats.org/drawingml/2006/chart" xmlns:dgm="http://schemas.openxmlformats.org/drawingml/2006/diagram" xmlns:o="urn:schemas-microsoft-com:office:office" xmlns:v="urn:schemas-microsoft-com:vml" xmlns:pvml="urn:schemas-microsoft-com:office:powerpoint" xmlns:com="http://schemas.openxmlformats.org/drawingml/2006/compatibility" xmlns:p14="http://schemas.microsoft.com/office/powerpoint/2010/main" xmlns:p15="http://schemas.microsoft.com/office/powerpoint/2012/main" xmlns:go="http://customooxmlschemas.google.com/" r:id="rId39" roundtripDataSignature="AMtx7mgWqGpmJnm2LhSO/E7EgiMMs26KqA=="/>
     </p:ext>
   </p:extLst>
 </p:presentation>
@@ -5108,7 +5109,7 @@
               <a:pPr>
                 <a:defRPr/>
               </a:pPr>
-              <a:t>18</a:t>
+              <a:t>19</a:t>
             </a:fld>
             <a:endParaRPr lang="en-US"/>
           </a:p>
@@ -10424,6 +10425,92 @@
 </file>
 
 <file path=ppt/slides/slide13.xml><?xml version="1.0" encoding="utf-8"?>
+<p:sld xmlns:a="http://schemas.openxmlformats.org/drawingml/2006/main" xmlns:r="http://schemas.openxmlformats.org/officeDocument/2006/relationships" xmlns:p="http://schemas.openxmlformats.org/presentationml/2006/main">
+  <p:cSld>
+    <p:spTree>
+      <p:nvGrpSpPr>
+        <p:cNvPr id="1" name=""/>
+        <p:cNvGrpSpPr/>
+        <p:nvPr/>
+      </p:nvGrpSpPr>
+      <p:grpSpPr>
+        <a:xfrm>
+          <a:off x="0" y="0"/>
+          <a:ext cx="0" cy="0"/>
+          <a:chOff x="0" y="0"/>
+          <a:chExt cx="0" cy="0"/>
+        </a:xfrm>
+      </p:grpSpPr>
+      <p:sp>
+        <p:nvSpPr>
+          <p:cNvPr id="4" name="Title 3">
+            <a:extLst>
+              <a:ext uri="{FF2B5EF4-FFF2-40B4-BE49-F238E27FC236}">
+                <a16:creationId xmlns:a16="http://schemas.microsoft.com/office/drawing/2014/main" id="{682FAD2D-7DBC-5F88-A441-2BDE7BD6A0E4}"/>
+              </a:ext>
+            </a:extLst>
+          </p:cNvPr>
+          <p:cNvSpPr>
+            <a:spLocks noGrp="1"/>
+          </p:cNvSpPr>
+          <p:nvPr>
+            <p:ph type="ctrTitle"/>
+          </p:nvPr>
+        </p:nvSpPr>
+        <p:spPr/>
+        <p:txBody>
+          <a:bodyPr/>
+          <a:lstStyle/>
+          <a:p>
+            <a:r>
+              <a:rPr lang="en-US" dirty="0"/>
+              <a:t>The Data we get is conditioned on a lot of things</a:t>
+            </a:r>
+          </a:p>
+        </p:txBody>
+      </p:sp>
+      <p:sp>
+        <p:nvSpPr>
+          <p:cNvPr id="5" name="Subtitle 4">
+            <a:extLst>
+              <a:ext uri="{FF2B5EF4-FFF2-40B4-BE49-F238E27FC236}">
+                <a16:creationId xmlns:a16="http://schemas.microsoft.com/office/drawing/2014/main" id="{F4579DE6-8807-25D6-9FDE-886FA2130CCD}"/>
+              </a:ext>
+            </a:extLst>
+          </p:cNvPr>
+          <p:cNvSpPr>
+            <a:spLocks noGrp="1"/>
+          </p:cNvSpPr>
+          <p:nvPr>
+            <p:ph type="subTitle" idx="1"/>
+          </p:nvPr>
+        </p:nvSpPr>
+        <p:spPr/>
+        <p:txBody>
+          <a:bodyPr/>
+          <a:lstStyle/>
+          <a:p>
+            <a:r>
+              <a:rPr lang="en-US" dirty="0"/>
+              <a:t>The models we build need to account for that</a:t>
+            </a:r>
+          </a:p>
+        </p:txBody>
+      </p:sp>
+    </p:spTree>
+    <p:extLst>
+      <p:ext uri="{BB962C8B-B14F-4D97-AF65-F5344CB8AC3E}">
+        <p14:creationId xmlns:p14="http://schemas.microsoft.com/office/powerpoint/2010/main" val="3179221035"/>
+      </p:ext>
+    </p:extLst>
+  </p:cSld>
+  <p:clrMapOvr>
+    <a:masterClrMapping/>
+  </p:clrMapOvr>
+</p:sld>
+</file>
+
+<file path=ppt/slides/slide14.xml><?xml version="1.0" encoding="utf-8"?>
 <p:sld xmlns:a="http://schemas.openxmlformats.org/drawingml/2006/main" xmlns:r="http://schemas.openxmlformats.org/officeDocument/2006/relationships" xmlns:p="http://schemas.openxmlformats.org/presentationml/2006/main">
   <p:cSld>
     <p:spTree>
@@ -14081,7 +14168,7 @@
 </p:sld>
 </file>
 
-<file path=ppt/slides/slide14.xml><?xml version="1.0" encoding="utf-8"?>
+<file path=ppt/slides/slide15.xml><?xml version="1.0" encoding="utf-8"?>
 <p:sld xmlns:a="http://schemas.openxmlformats.org/drawingml/2006/main" xmlns:r="http://schemas.openxmlformats.org/officeDocument/2006/relationships" xmlns:p="http://schemas.openxmlformats.org/presentationml/2006/main">
   <p:cSld>
     <p:spTree>
@@ -14309,7 +14396,7 @@
 </p:sld>
 </file>
 
-<file path=ppt/slides/slide15.xml><?xml version="1.0" encoding="utf-8"?>
+<file path=ppt/slides/slide16.xml><?xml version="1.0" encoding="utf-8"?>
 <p:sld xmlns:a="http://schemas.openxmlformats.org/drawingml/2006/main" xmlns:r="http://schemas.openxmlformats.org/officeDocument/2006/relationships" xmlns:p="http://schemas.openxmlformats.org/presentationml/2006/main">
   <p:cSld>
     <p:spTree>
@@ -14397,7 +14484,7 @@
 </p:sld>
 </file>
 
-<file path=ppt/slides/slide16.xml><?xml version="1.0" encoding="utf-8"?>
+<file path=ppt/slides/slide17.xml><?xml version="1.0" encoding="utf-8"?>
 <p:sld xmlns:a="http://schemas.openxmlformats.org/drawingml/2006/main" xmlns:r="http://schemas.openxmlformats.org/officeDocument/2006/relationships" xmlns:p="http://schemas.openxmlformats.org/presentationml/2006/main">
   <p:cSld>
     <p:spTree>
@@ -14835,7 +14922,7 @@
 </p:sld>
 </file>
 
-<file path=ppt/slides/slide17.xml><?xml version="1.0" encoding="utf-8"?>
+<file path=ppt/slides/slide18.xml><?xml version="1.0" encoding="utf-8"?>
 <p:sld xmlns:a="http://schemas.openxmlformats.org/drawingml/2006/main" xmlns:r="http://schemas.openxmlformats.org/officeDocument/2006/relationships" xmlns:p="http://schemas.openxmlformats.org/presentationml/2006/main">
   <p:cSld>
     <p:spTree>
@@ -15639,7 +15726,7 @@
 </p:sld>
 </file>
 
-<file path=ppt/slides/slide18.xml><?xml version="1.0" encoding="utf-8"?>
+<file path=ppt/slides/slide19.xml><?xml version="1.0" encoding="utf-8"?>
 <p:sld xmlns:a="http://schemas.openxmlformats.org/drawingml/2006/main" xmlns:r="http://schemas.openxmlformats.org/officeDocument/2006/relationships" xmlns:p="http://schemas.openxmlformats.org/presentationml/2006/main">
   <p:cSld>
     <p:spTree>
@@ -15706,111 +15793,6 @@
     <p:extLst>
       <p:ext uri="{BB962C8B-B14F-4D97-AF65-F5344CB8AC3E}">
         <p14:creationId xmlns:p14="http://schemas.microsoft.com/office/powerpoint/2010/main" val="2318287402"/>
-      </p:ext>
-    </p:extLst>
-  </p:cSld>
-  <p:clrMapOvr>
-    <a:masterClrMapping/>
-  </p:clrMapOvr>
-</p:sld>
-</file>
-
-<file path=ppt/slides/slide19.xml><?xml version="1.0" encoding="utf-8"?>
-<p:sld xmlns:a="http://schemas.openxmlformats.org/drawingml/2006/main" xmlns:r="http://schemas.openxmlformats.org/officeDocument/2006/relationships" xmlns:p="http://schemas.openxmlformats.org/presentationml/2006/main">
-  <p:cSld>
-    <p:spTree>
-      <p:nvGrpSpPr>
-        <p:cNvPr id="1" name=""/>
-        <p:cNvGrpSpPr/>
-        <p:nvPr/>
-      </p:nvGrpSpPr>
-      <p:grpSpPr>
-        <a:xfrm>
-          <a:off x="0" y="0"/>
-          <a:ext cx="0" cy="0"/>
-          <a:chOff x="0" y="0"/>
-          <a:chExt cx="0" cy="0"/>
-        </a:xfrm>
-      </p:grpSpPr>
-      <p:sp>
-        <p:nvSpPr>
-          <p:cNvPr id="3" name="Title 2">
-            <a:extLst>
-              <a:ext uri="{FF2B5EF4-FFF2-40B4-BE49-F238E27FC236}">
-                <a16:creationId xmlns:a16="http://schemas.microsoft.com/office/drawing/2014/main" id="{92E038B8-9DA1-054F-B953-838194CAC13F}"/>
-              </a:ext>
-            </a:extLst>
-          </p:cNvPr>
-          <p:cNvSpPr>
-            <a:spLocks noGrp="1"/>
-          </p:cNvSpPr>
-          <p:nvPr>
-            <p:ph type="title"/>
-          </p:nvPr>
-        </p:nvSpPr>
-        <p:spPr/>
-        <p:txBody>
-          <a:bodyPr/>
-          <a:lstStyle/>
-          <a:p>
-            <a:r>
-              <a:rPr lang="en-US" sz="3733" dirty="0"/>
-              <a:t>Translating policy goals to fairness metrics</a:t>
-            </a:r>
-          </a:p>
-        </p:txBody>
-      </p:sp>
-      <p:pic>
-        <p:nvPicPr>
-          <p:cNvPr id="1026" name="Picture 2">
-            <a:extLst>
-              <a:ext uri="{FF2B5EF4-FFF2-40B4-BE49-F238E27FC236}">
-                <a16:creationId xmlns:a16="http://schemas.microsoft.com/office/drawing/2014/main" id="{8B63C0A7-081E-3D4F-B1C8-1DEEE1091D41}"/>
-              </a:ext>
-            </a:extLst>
-          </p:cNvPr>
-          <p:cNvPicPr>
-            <a:picLocks noChangeAspect="1" noChangeArrowheads="1"/>
-          </p:cNvPicPr>
-          <p:nvPr/>
-        </p:nvPicPr>
-        <p:blipFill>
-          <a:blip r:embed="rId2">
-            <a:extLst>
-              <a:ext uri="{28A0092B-C50C-407E-A947-70E740481C1C}">
-                <a14:useLocalDpi xmlns:a14="http://schemas.microsoft.com/office/drawing/2010/main" val="0"/>
-              </a:ext>
-            </a:extLst>
-          </a:blip>
-          <a:srcRect/>
-          <a:stretch>
-            <a:fillRect/>
-          </a:stretch>
-        </p:blipFill>
-        <p:spPr bwMode="auto">
-          <a:xfrm>
-            <a:off x="24014" y="1116762"/>
-            <a:ext cx="12192000" cy="5654675"/>
-          </a:xfrm>
-          <a:prstGeom prst="rect">
-            <a:avLst/>
-          </a:prstGeom>
-          <a:noFill/>
-          <a:extLst>
-            <a:ext uri="{909E8E84-426E-40DD-AFC4-6F175D3DCCD1}">
-              <a14:hiddenFill xmlns:a14="http://schemas.microsoft.com/office/drawing/2010/main">
-                <a:solidFill>
-                  <a:srgbClr val="FFFFFF"/>
-                </a:solidFill>
-              </a14:hiddenFill>
-            </a:ext>
-          </a:extLst>
-        </p:spPr>
-      </p:pic>
-    </p:spTree>
-    <p:extLst>
-      <p:ext uri="{BB962C8B-B14F-4D97-AF65-F5344CB8AC3E}">
-        <p14:creationId xmlns:p14="http://schemas.microsoft.com/office/powerpoint/2010/main" val="1943044122"/>
       </p:ext>
     </p:extLst>
   </p:cSld>
@@ -15928,6 +15910,111 @@
 </file>
 
 <file path=ppt/slides/slide20.xml><?xml version="1.0" encoding="utf-8"?>
+<p:sld xmlns:a="http://schemas.openxmlformats.org/drawingml/2006/main" xmlns:r="http://schemas.openxmlformats.org/officeDocument/2006/relationships" xmlns:p="http://schemas.openxmlformats.org/presentationml/2006/main">
+  <p:cSld>
+    <p:spTree>
+      <p:nvGrpSpPr>
+        <p:cNvPr id="1" name=""/>
+        <p:cNvGrpSpPr/>
+        <p:nvPr/>
+      </p:nvGrpSpPr>
+      <p:grpSpPr>
+        <a:xfrm>
+          <a:off x="0" y="0"/>
+          <a:ext cx="0" cy="0"/>
+          <a:chOff x="0" y="0"/>
+          <a:chExt cx="0" cy="0"/>
+        </a:xfrm>
+      </p:grpSpPr>
+      <p:sp>
+        <p:nvSpPr>
+          <p:cNvPr id="3" name="Title 2">
+            <a:extLst>
+              <a:ext uri="{FF2B5EF4-FFF2-40B4-BE49-F238E27FC236}">
+                <a16:creationId xmlns:a16="http://schemas.microsoft.com/office/drawing/2014/main" id="{92E038B8-9DA1-054F-B953-838194CAC13F}"/>
+              </a:ext>
+            </a:extLst>
+          </p:cNvPr>
+          <p:cNvSpPr>
+            <a:spLocks noGrp="1"/>
+          </p:cNvSpPr>
+          <p:nvPr>
+            <p:ph type="title"/>
+          </p:nvPr>
+        </p:nvSpPr>
+        <p:spPr/>
+        <p:txBody>
+          <a:bodyPr/>
+          <a:lstStyle/>
+          <a:p>
+            <a:r>
+              <a:rPr lang="en-US" sz="3733" dirty="0"/>
+              <a:t>Translating policy goals to fairness metrics</a:t>
+            </a:r>
+          </a:p>
+        </p:txBody>
+      </p:sp>
+      <p:pic>
+        <p:nvPicPr>
+          <p:cNvPr id="1026" name="Picture 2">
+            <a:extLst>
+              <a:ext uri="{FF2B5EF4-FFF2-40B4-BE49-F238E27FC236}">
+                <a16:creationId xmlns:a16="http://schemas.microsoft.com/office/drawing/2014/main" id="{8B63C0A7-081E-3D4F-B1C8-1DEEE1091D41}"/>
+              </a:ext>
+            </a:extLst>
+          </p:cNvPr>
+          <p:cNvPicPr>
+            <a:picLocks noChangeAspect="1" noChangeArrowheads="1"/>
+          </p:cNvPicPr>
+          <p:nvPr/>
+        </p:nvPicPr>
+        <p:blipFill>
+          <a:blip r:embed="rId2">
+            <a:extLst>
+              <a:ext uri="{28A0092B-C50C-407E-A947-70E740481C1C}">
+                <a14:useLocalDpi xmlns:a14="http://schemas.microsoft.com/office/drawing/2010/main" val="0"/>
+              </a:ext>
+            </a:extLst>
+          </a:blip>
+          <a:srcRect/>
+          <a:stretch>
+            <a:fillRect/>
+          </a:stretch>
+        </p:blipFill>
+        <p:spPr bwMode="auto">
+          <a:xfrm>
+            <a:off x="24014" y="1116762"/>
+            <a:ext cx="12192000" cy="5654675"/>
+          </a:xfrm>
+          <a:prstGeom prst="rect">
+            <a:avLst/>
+          </a:prstGeom>
+          <a:noFill/>
+          <a:extLst>
+            <a:ext uri="{909E8E84-426E-40DD-AFC4-6F175D3DCCD1}">
+              <a14:hiddenFill xmlns:a14="http://schemas.microsoft.com/office/drawing/2010/main">
+                <a:solidFill>
+                  <a:srgbClr val="FFFFFF"/>
+                </a:solidFill>
+              </a14:hiddenFill>
+            </a:ext>
+          </a:extLst>
+        </p:spPr>
+      </p:pic>
+    </p:spTree>
+    <p:extLst>
+      <p:ext uri="{BB962C8B-B14F-4D97-AF65-F5344CB8AC3E}">
+        <p14:creationId xmlns:p14="http://schemas.microsoft.com/office/powerpoint/2010/main" val="1943044122"/>
+      </p:ext>
+    </p:extLst>
+  </p:cSld>
+  <p:clrMapOvr>
+    <a:masterClrMapping/>
+  </p:clrMapOvr>
+</p:sld>
+</file>
+
+<file path=ppt/slides/slide21.xml><?xml version="1.0" encoding="utf-8"?>
 <p:sld xmlns:a="http://schemas.openxmlformats.org/drawingml/2006/main" xmlns:r="http://schemas.openxmlformats.org/officeDocument/2006/relationships" xmlns:p="http://schemas.openxmlformats.org/presentationml/2006/main">
   <p:cSld>
     <p:spTree>
@@ -16769,7 +16856,7 @@
 </p:sld>
 </file>
 
-<file path=ppt/slides/slide21.xml><?xml version="1.0" encoding="utf-8"?>
+<file path=ppt/slides/slide22.xml><?xml version="1.0" encoding="utf-8"?>
 <p:sld xmlns:a="http://schemas.openxmlformats.org/drawingml/2006/main" xmlns:r="http://schemas.openxmlformats.org/officeDocument/2006/relationships" xmlns:p="http://schemas.openxmlformats.org/presentationml/2006/main" show="0">
   <p:cSld>
     <p:spTree>
@@ -16888,7 +16975,7 @@
 </p:sld>
 </file>
 
-<file path=ppt/slides/slide22.xml><?xml version="1.0" encoding="utf-8"?>
+<file path=ppt/slides/slide23.xml><?xml version="1.0" encoding="utf-8"?>
 <p:sld xmlns:a="http://schemas.openxmlformats.org/drawingml/2006/main" xmlns:r="http://schemas.openxmlformats.org/officeDocument/2006/relationships" xmlns:p="http://schemas.openxmlformats.org/presentationml/2006/main" show="0">
   <p:cSld>
     <p:spTree>

--- a/Lectures/Lecture22-Wrapup.pptx
+++ b/Lectures/Lecture22-Wrapup.pptx
@@ -13,14 +13,14 @@
     <p:sldId id="606" r:id="rId4"/>
     <p:sldId id="257" r:id="rId5"/>
     <p:sldId id="607" r:id="rId6"/>
-    <p:sldId id="608" r:id="rId7"/>
-    <p:sldId id="610" r:id="rId8"/>
-    <p:sldId id="612" r:id="rId9"/>
-    <p:sldId id="609" r:id="rId10"/>
-    <p:sldId id="613" r:id="rId11"/>
-    <p:sldId id="614" r:id="rId12"/>
-    <p:sldId id="611" r:id="rId13"/>
-    <p:sldId id="621" r:id="rId14"/>
+    <p:sldId id="621" r:id="rId7"/>
+    <p:sldId id="608" r:id="rId8"/>
+    <p:sldId id="610" r:id="rId9"/>
+    <p:sldId id="612" r:id="rId10"/>
+    <p:sldId id="609" r:id="rId11"/>
+    <p:sldId id="613" r:id="rId12"/>
+    <p:sldId id="614" r:id="rId13"/>
+    <p:sldId id="611" r:id="rId14"/>
     <p:sldId id="258" r:id="rId15"/>
     <p:sldId id="505" r:id="rId16"/>
     <p:sldId id="547" r:id="rId17"/>
@@ -268,7 +268,7 @@
       <p15:sldGuideLst xmlns:p15="http://schemas.microsoft.com/office/powerpoint/2012/main"/>
     </p:ext>
     <p:ext uri="http://customooxmlschemas.google.com/">
-      <go:slidesCustomData xmlns="" xmlns:mc="http://schemas.openxmlformats.org/markup-compatibility/2006" xmlns:mv="urn:schemas-microsoft-com:mac:vml" xmlns:c="http://schemas.openxmlformats.org/drawingml/2006/chart" xmlns:dgm="http://schemas.openxmlformats.org/drawingml/2006/diagram" xmlns:o="urn:schemas-microsoft-com:office:office" xmlns:v="urn:schemas-microsoft-com:vml" xmlns:pvml="urn:schemas-microsoft-com:office:powerpoint" xmlns:com="http://schemas.openxmlformats.org/drawingml/2006/compatibility" xmlns:p14="http://schemas.microsoft.com/office/powerpoint/2010/main" xmlns:p15="http://schemas.microsoft.com/office/powerpoint/2012/main" xmlns:go="http://customooxmlschemas.google.com/" r:id="rId39" roundtripDataSignature="AMtx7mgWqGpmJnm2LhSO/E7EgiMMs26KqA=="/>
+      <go:slidesCustomData xmlns:go="http://customooxmlschemas.google.com/" xmlns:p15="http://schemas.microsoft.com/office/powerpoint/2012/main" xmlns:p14="http://schemas.microsoft.com/office/powerpoint/2010/main" xmlns:com="http://schemas.openxmlformats.org/drawingml/2006/compatibility" xmlns:pvml="urn:schemas-microsoft-com:office:powerpoint" xmlns:v="urn:schemas-microsoft-com:vml" xmlns:o="urn:schemas-microsoft-com:office:office" xmlns:dgm="http://schemas.openxmlformats.org/drawingml/2006/diagram" xmlns:c="http://schemas.openxmlformats.org/drawingml/2006/chart" xmlns:mv="urn:schemas-microsoft-com:mac:vml" xmlns:mc="http://schemas.openxmlformats.org/markup-compatibility/2006" xmlns="" r:id="rId39" roundtripDataSignature="AMtx7mgWqGpmJnm2LhSO/E7EgiMMs26KqA=="/>
     </p:ext>
   </p:extLst>
 </p:presentation>
@@ -9911,6 +9911,188 @@
         <p:spPr>
           <a:xfrm>
             <a:off x="0" y="939113"/>
+            <a:ext cx="12192000" cy="2677656"/>
+          </a:xfrm>
+          <a:prstGeom prst="rect">
+            <a:avLst/>
+          </a:prstGeom>
+          <a:noFill/>
+        </p:spPr>
+        <p:txBody>
+          <a:bodyPr wrap="square" rtlCol="0">
+            <a:spAutoFit/>
+          </a:bodyPr>
+          <a:lstStyle/>
+          <a:p>
+            <a:pPr algn="ctr"/>
+            <a:r>
+              <a:rPr lang="en-US" sz="6000" dirty="0"/>
+              <a:t>The Defaults Are</a:t>
+            </a:r>
+          </a:p>
+          <a:p>
+            <a:pPr algn="ctr"/>
+            <a:r>
+              <a:rPr lang="en-US" sz="6000" dirty="0"/>
+              <a:t>Mostly Bad</a:t>
+            </a:r>
+          </a:p>
+          <a:p>
+            <a:pPr algn="ctr"/>
+            <a:r>
+              <a:rPr lang="en-US" sz="4800" dirty="0"/>
+              <a:t>(aka Models Don’t Give 0/1 Labels)</a:t>
+            </a:r>
+            <a:endParaRPr lang="en-US" sz="6000" dirty="0"/>
+          </a:p>
+        </p:txBody>
+      </p:sp>
+      <p:sp>
+        <p:nvSpPr>
+          <p:cNvPr id="3" name="TextBox 2">
+            <a:extLst>
+              <a:ext uri="{FF2B5EF4-FFF2-40B4-BE49-F238E27FC236}">
+                <a16:creationId xmlns:a16="http://schemas.microsoft.com/office/drawing/2014/main" id="{B9A67CE4-74EB-6347-AAAD-BA98D84CDF7A}"/>
+              </a:ext>
+            </a:extLst>
+          </p:cNvPr>
+          <p:cNvSpPr txBox="1"/>
+          <p:nvPr/>
+        </p:nvSpPr>
+        <p:spPr>
+          <a:xfrm>
+            <a:off x="0" y="4609070"/>
+            <a:ext cx="12191999" cy="1881925"/>
+          </a:xfrm>
+          <a:prstGeom prst="rect">
+            <a:avLst/>
+          </a:prstGeom>
+          <a:noFill/>
+        </p:spPr>
+        <p:txBody>
+          <a:bodyPr wrap="square" rtlCol="0">
+            <a:spAutoFit/>
+          </a:bodyPr>
+          <a:lstStyle/>
+          <a:p>
+            <a:pPr algn="ctr">
+              <a:lnSpc>
+                <a:spcPct val="150000"/>
+              </a:lnSpc>
+            </a:pPr>
+            <a:r>
+              <a:rPr lang="en-US" sz="2000" dirty="0">
+                <a:solidFill>
+                  <a:schemeClr val="tx1">
+                    <a:lumMod val="75000"/>
+                    <a:lumOff val="25000"/>
+                  </a:schemeClr>
+                </a:solidFill>
+              </a:rPr>
+              <a:t>Models give scores not predicted classes, and these are rarely probabilities</a:t>
+            </a:r>
+          </a:p>
+          <a:p>
+            <a:pPr algn="ctr">
+              <a:lnSpc>
+                <a:spcPct val="150000"/>
+              </a:lnSpc>
+            </a:pPr>
+            <a:r>
+              <a:rPr lang="en-US" sz="2000" dirty="0">
+                <a:solidFill>
+                  <a:schemeClr val="tx1">
+                    <a:lumMod val="75000"/>
+                    <a:lumOff val="25000"/>
+                  </a:schemeClr>
+                </a:solidFill>
+              </a:rPr>
+              <a:t>There’s no such thing as absolute accuracy, precision, or recall </a:t>
+            </a:r>
+          </a:p>
+          <a:p>
+            <a:pPr algn="ctr">
+              <a:lnSpc>
+                <a:spcPct val="150000"/>
+              </a:lnSpc>
+            </a:pPr>
+            <a:r>
+              <a:rPr lang="en-US" sz="2000" dirty="0">
+                <a:solidFill>
+                  <a:schemeClr val="tx1">
+                    <a:lumMod val="75000"/>
+                    <a:lumOff val="25000"/>
+                  </a:schemeClr>
+                </a:solidFill>
+              </a:rPr>
+              <a:t>A 0.5 score threshold is almost never what you want</a:t>
+            </a:r>
+          </a:p>
+          <a:p>
+            <a:pPr algn="ctr">
+              <a:lnSpc>
+                <a:spcPct val="150000"/>
+              </a:lnSpc>
+            </a:pPr>
+            <a:r>
+              <a:rPr lang="en-US" sz="2000" dirty="0">
+                <a:solidFill>
+                  <a:schemeClr val="tx1">
+                    <a:lumMod val="75000"/>
+                    <a:lumOff val="25000"/>
+                  </a:schemeClr>
+                </a:solidFill>
+              </a:rPr>
+              <a:t>Hyperparameters matter and defaults in many packages aren’t great</a:t>
+            </a:r>
+          </a:p>
+        </p:txBody>
+      </p:sp>
+    </p:spTree>
+    <p:extLst>
+      <p:ext uri="{BB962C8B-B14F-4D97-AF65-F5344CB8AC3E}">
+        <p14:creationId xmlns:p14="http://schemas.microsoft.com/office/powerpoint/2010/main" val="891097527"/>
+      </p:ext>
+    </p:extLst>
+  </p:cSld>
+  <p:clrMapOvr>
+    <a:masterClrMapping/>
+  </p:clrMapOvr>
+</p:sld>
+</file>
+
+<file path=ppt/slides/slide11.xml><?xml version="1.0" encoding="utf-8"?>
+<p:sld xmlns:a="http://schemas.openxmlformats.org/drawingml/2006/main" xmlns:r="http://schemas.openxmlformats.org/officeDocument/2006/relationships" xmlns:p="http://schemas.openxmlformats.org/presentationml/2006/main">
+  <p:cSld>
+    <p:spTree>
+      <p:nvGrpSpPr>
+        <p:cNvPr id="1" name=""/>
+        <p:cNvGrpSpPr/>
+        <p:nvPr/>
+      </p:nvGrpSpPr>
+      <p:grpSpPr>
+        <a:xfrm>
+          <a:off x="0" y="0"/>
+          <a:ext cx="0" cy="0"/>
+          <a:chOff x="0" y="0"/>
+          <a:chExt cx="0" cy="0"/>
+        </a:xfrm>
+      </p:grpSpPr>
+      <p:sp>
+        <p:nvSpPr>
+          <p:cNvPr id="2" name="TextBox 1">
+            <a:extLst>
+              <a:ext uri="{FF2B5EF4-FFF2-40B4-BE49-F238E27FC236}">
+                <a16:creationId xmlns:a16="http://schemas.microsoft.com/office/drawing/2014/main" id="{7DB19C05-CED6-C148-A24D-D699C2F6862F}"/>
+              </a:ext>
+            </a:extLst>
+          </p:cNvPr>
+          <p:cNvSpPr txBox="1"/>
+          <p:nvPr/>
+        </p:nvSpPr>
+        <p:spPr>
+          <a:xfrm>
+            <a:off x="0" y="939113"/>
             <a:ext cx="12192000" cy="1015663"/>
           </a:xfrm>
           <a:prstGeom prst="rect">
@@ -10090,7 +10272,7 @@
 </p:sld>
 </file>
 
-<file path=ppt/slides/slide11.xml><?xml version="1.0" encoding="utf-8"?>
+<file path=ppt/slides/slide12.xml><?xml version="1.0" encoding="utf-8"?>
 <p:sld xmlns:a="http://schemas.openxmlformats.org/drawingml/2006/main" xmlns:r="http://schemas.openxmlformats.org/officeDocument/2006/relationships" xmlns:p="http://schemas.openxmlformats.org/presentationml/2006/main">
   <p:cSld>
     <p:spTree>
@@ -10257,7 +10439,7 @@
 </p:sld>
 </file>
 
-<file path=ppt/slides/slide12.xml><?xml version="1.0" encoding="utf-8"?>
+<file path=ppt/slides/slide13.xml><?xml version="1.0" encoding="utf-8"?>
 <p:sld xmlns:a="http://schemas.openxmlformats.org/drawingml/2006/main" xmlns:r="http://schemas.openxmlformats.org/officeDocument/2006/relationships" xmlns:p="http://schemas.openxmlformats.org/presentationml/2006/main">
   <p:cSld>
     <p:spTree>
@@ -10415,92 +10597,6 @@
     <p:extLst>
       <p:ext uri="{BB962C8B-B14F-4D97-AF65-F5344CB8AC3E}">
         <p14:creationId xmlns:p14="http://schemas.microsoft.com/office/powerpoint/2010/main" val="3239537904"/>
-      </p:ext>
-    </p:extLst>
-  </p:cSld>
-  <p:clrMapOvr>
-    <a:masterClrMapping/>
-  </p:clrMapOvr>
-</p:sld>
-</file>
-
-<file path=ppt/slides/slide13.xml><?xml version="1.0" encoding="utf-8"?>
-<p:sld xmlns:a="http://schemas.openxmlformats.org/drawingml/2006/main" xmlns:r="http://schemas.openxmlformats.org/officeDocument/2006/relationships" xmlns:p="http://schemas.openxmlformats.org/presentationml/2006/main">
-  <p:cSld>
-    <p:spTree>
-      <p:nvGrpSpPr>
-        <p:cNvPr id="1" name=""/>
-        <p:cNvGrpSpPr/>
-        <p:nvPr/>
-      </p:nvGrpSpPr>
-      <p:grpSpPr>
-        <a:xfrm>
-          <a:off x="0" y="0"/>
-          <a:ext cx="0" cy="0"/>
-          <a:chOff x="0" y="0"/>
-          <a:chExt cx="0" cy="0"/>
-        </a:xfrm>
-      </p:grpSpPr>
-      <p:sp>
-        <p:nvSpPr>
-          <p:cNvPr id="4" name="Title 3">
-            <a:extLst>
-              <a:ext uri="{FF2B5EF4-FFF2-40B4-BE49-F238E27FC236}">
-                <a16:creationId xmlns:a16="http://schemas.microsoft.com/office/drawing/2014/main" id="{682FAD2D-7DBC-5F88-A441-2BDE7BD6A0E4}"/>
-              </a:ext>
-            </a:extLst>
-          </p:cNvPr>
-          <p:cNvSpPr>
-            <a:spLocks noGrp="1"/>
-          </p:cNvSpPr>
-          <p:nvPr>
-            <p:ph type="ctrTitle"/>
-          </p:nvPr>
-        </p:nvSpPr>
-        <p:spPr/>
-        <p:txBody>
-          <a:bodyPr/>
-          <a:lstStyle/>
-          <a:p>
-            <a:r>
-              <a:rPr lang="en-US" dirty="0"/>
-              <a:t>The Data we get is conditioned on a lot of things</a:t>
-            </a:r>
-          </a:p>
-        </p:txBody>
-      </p:sp>
-      <p:sp>
-        <p:nvSpPr>
-          <p:cNvPr id="5" name="Subtitle 4">
-            <a:extLst>
-              <a:ext uri="{FF2B5EF4-FFF2-40B4-BE49-F238E27FC236}">
-                <a16:creationId xmlns:a16="http://schemas.microsoft.com/office/drawing/2014/main" id="{F4579DE6-8807-25D6-9FDE-886FA2130CCD}"/>
-              </a:ext>
-            </a:extLst>
-          </p:cNvPr>
-          <p:cNvSpPr>
-            <a:spLocks noGrp="1"/>
-          </p:cNvSpPr>
-          <p:nvPr>
-            <p:ph type="subTitle" idx="1"/>
-          </p:nvPr>
-        </p:nvSpPr>
-        <p:spPr/>
-        <p:txBody>
-          <a:bodyPr/>
-          <a:lstStyle/>
-          <a:p>
-            <a:r>
-              <a:rPr lang="en-US" dirty="0"/>
-              <a:t>The models we build need to account for that</a:t>
-            </a:r>
-          </a:p>
-        </p:txBody>
-      </p:sp>
-    </p:spTree>
-    <p:extLst>
-      <p:ext uri="{BB962C8B-B14F-4D97-AF65-F5344CB8AC3E}">
-        <p14:creationId xmlns:p14="http://schemas.microsoft.com/office/powerpoint/2010/main" val="3179221035"/>
       </p:ext>
     </p:extLst>
   </p:cSld>
@@ -17561,6 +17657,92 @@
       </p:grpSpPr>
       <p:sp>
         <p:nvSpPr>
+          <p:cNvPr id="4" name="Title 3">
+            <a:extLst>
+              <a:ext uri="{FF2B5EF4-FFF2-40B4-BE49-F238E27FC236}">
+                <a16:creationId xmlns:a16="http://schemas.microsoft.com/office/drawing/2014/main" id="{682FAD2D-7DBC-5F88-A441-2BDE7BD6A0E4}"/>
+              </a:ext>
+            </a:extLst>
+          </p:cNvPr>
+          <p:cNvSpPr>
+            <a:spLocks noGrp="1"/>
+          </p:cNvSpPr>
+          <p:nvPr>
+            <p:ph type="ctrTitle"/>
+          </p:nvPr>
+        </p:nvSpPr>
+        <p:spPr/>
+        <p:txBody>
+          <a:bodyPr/>
+          <a:lstStyle/>
+          <a:p>
+            <a:r>
+              <a:rPr lang="en-US" dirty="0"/>
+              <a:t>The Data we get is conditioned on a lot of things</a:t>
+            </a:r>
+          </a:p>
+        </p:txBody>
+      </p:sp>
+      <p:sp>
+        <p:nvSpPr>
+          <p:cNvPr id="5" name="Subtitle 4">
+            <a:extLst>
+              <a:ext uri="{FF2B5EF4-FFF2-40B4-BE49-F238E27FC236}">
+                <a16:creationId xmlns:a16="http://schemas.microsoft.com/office/drawing/2014/main" id="{F4579DE6-8807-25D6-9FDE-886FA2130CCD}"/>
+              </a:ext>
+            </a:extLst>
+          </p:cNvPr>
+          <p:cNvSpPr>
+            <a:spLocks noGrp="1"/>
+          </p:cNvSpPr>
+          <p:nvPr>
+            <p:ph type="subTitle" idx="1"/>
+          </p:nvPr>
+        </p:nvSpPr>
+        <p:spPr/>
+        <p:txBody>
+          <a:bodyPr/>
+          <a:lstStyle/>
+          <a:p>
+            <a:r>
+              <a:rPr lang="en-US" dirty="0"/>
+              <a:t>The models we build need to account for that</a:t>
+            </a:r>
+          </a:p>
+        </p:txBody>
+      </p:sp>
+    </p:spTree>
+    <p:extLst>
+      <p:ext uri="{BB962C8B-B14F-4D97-AF65-F5344CB8AC3E}">
+        <p14:creationId xmlns:p14="http://schemas.microsoft.com/office/powerpoint/2010/main" val="3179221035"/>
+      </p:ext>
+    </p:extLst>
+  </p:cSld>
+  <p:clrMapOvr>
+    <a:masterClrMapping/>
+  </p:clrMapOvr>
+</p:sld>
+</file>
+
+<file path=ppt/slides/slide7.xml><?xml version="1.0" encoding="utf-8"?>
+<p:sld xmlns:a="http://schemas.openxmlformats.org/drawingml/2006/main" xmlns:r="http://schemas.openxmlformats.org/officeDocument/2006/relationships" xmlns:p="http://schemas.openxmlformats.org/presentationml/2006/main">
+  <p:cSld>
+    <p:spTree>
+      <p:nvGrpSpPr>
+        <p:cNvPr id="1" name=""/>
+        <p:cNvGrpSpPr/>
+        <p:nvPr/>
+      </p:nvGrpSpPr>
+      <p:grpSpPr>
+        <a:xfrm>
+          <a:off x="0" y="0"/>
+          <a:ext cx="0" cy="0"/>
+          <a:chOff x="0" y="0"/>
+          <a:chExt cx="0" cy="0"/>
+        </a:xfrm>
+      </p:grpSpPr>
+      <p:sp>
+        <p:nvSpPr>
           <p:cNvPr id="2" name="TextBox 1">
             <a:extLst>
               <a:ext uri="{FF2B5EF4-FFF2-40B4-BE49-F238E27FC236}">
@@ -17741,7 +17923,7 @@
 </p:sld>
 </file>
 
-<file path=ppt/slides/slide7.xml><?xml version="1.0" encoding="utf-8"?>
+<file path=ppt/slides/slide8.xml><?xml version="1.0" encoding="utf-8"?>
 <p:sld xmlns:a="http://schemas.openxmlformats.org/drawingml/2006/main" xmlns:r="http://schemas.openxmlformats.org/officeDocument/2006/relationships" xmlns:p="http://schemas.openxmlformats.org/presentationml/2006/main">
   <p:cSld>
     <p:spTree>
@@ -17940,7 +18122,7 @@
 </p:sld>
 </file>
 
-<file path=ppt/slides/slide8.xml><?xml version="1.0" encoding="utf-8"?>
+<file path=ppt/slides/slide9.xml><?xml version="1.0" encoding="utf-8"?>
 <p:sld xmlns:a="http://schemas.openxmlformats.org/drawingml/2006/main" xmlns:r="http://schemas.openxmlformats.org/officeDocument/2006/relationships" xmlns:p="http://schemas.openxmlformats.org/presentationml/2006/main">
   <p:cSld>
     <p:spTree>
@@ -18080,188 +18262,6 @@
     <p:extLst>
       <p:ext uri="{BB962C8B-B14F-4D97-AF65-F5344CB8AC3E}">
         <p14:creationId xmlns:p14="http://schemas.microsoft.com/office/powerpoint/2010/main" val="410953456"/>
-      </p:ext>
-    </p:extLst>
-  </p:cSld>
-  <p:clrMapOvr>
-    <a:masterClrMapping/>
-  </p:clrMapOvr>
-</p:sld>
-</file>
-
-<file path=ppt/slides/slide9.xml><?xml version="1.0" encoding="utf-8"?>
-<p:sld xmlns:a="http://schemas.openxmlformats.org/drawingml/2006/main" xmlns:r="http://schemas.openxmlformats.org/officeDocument/2006/relationships" xmlns:p="http://schemas.openxmlformats.org/presentationml/2006/main">
-  <p:cSld>
-    <p:spTree>
-      <p:nvGrpSpPr>
-        <p:cNvPr id="1" name=""/>
-        <p:cNvGrpSpPr/>
-        <p:nvPr/>
-      </p:nvGrpSpPr>
-      <p:grpSpPr>
-        <a:xfrm>
-          <a:off x="0" y="0"/>
-          <a:ext cx="0" cy="0"/>
-          <a:chOff x="0" y="0"/>
-          <a:chExt cx="0" cy="0"/>
-        </a:xfrm>
-      </p:grpSpPr>
-      <p:sp>
-        <p:nvSpPr>
-          <p:cNvPr id="2" name="TextBox 1">
-            <a:extLst>
-              <a:ext uri="{FF2B5EF4-FFF2-40B4-BE49-F238E27FC236}">
-                <a16:creationId xmlns:a16="http://schemas.microsoft.com/office/drawing/2014/main" id="{7DB19C05-CED6-C148-A24D-D699C2F6862F}"/>
-              </a:ext>
-            </a:extLst>
-          </p:cNvPr>
-          <p:cNvSpPr txBox="1"/>
-          <p:nvPr/>
-        </p:nvSpPr>
-        <p:spPr>
-          <a:xfrm>
-            <a:off x="0" y="939113"/>
-            <a:ext cx="12192000" cy="2677656"/>
-          </a:xfrm>
-          <a:prstGeom prst="rect">
-            <a:avLst/>
-          </a:prstGeom>
-          <a:noFill/>
-        </p:spPr>
-        <p:txBody>
-          <a:bodyPr wrap="square" rtlCol="0">
-            <a:spAutoFit/>
-          </a:bodyPr>
-          <a:lstStyle/>
-          <a:p>
-            <a:pPr algn="ctr"/>
-            <a:r>
-              <a:rPr lang="en-US" sz="6000" dirty="0"/>
-              <a:t>The Defaults Are</a:t>
-            </a:r>
-          </a:p>
-          <a:p>
-            <a:pPr algn="ctr"/>
-            <a:r>
-              <a:rPr lang="en-US" sz="6000" dirty="0"/>
-              <a:t>Mostly Bad</a:t>
-            </a:r>
-          </a:p>
-          <a:p>
-            <a:pPr algn="ctr"/>
-            <a:r>
-              <a:rPr lang="en-US" sz="4800" dirty="0"/>
-              <a:t>(aka Models Don’t Give 0/1 Labels)</a:t>
-            </a:r>
-            <a:endParaRPr lang="en-US" sz="6000" dirty="0"/>
-          </a:p>
-        </p:txBody>
-      </p:sp>
-      <p:sp>
-        <p:nvSpPr>
-          <p:cNvPr id="3" name="TextBox 2">
-            <a:extLst>
-              <a:ext uri="{FF2B5EF4-FFF2-40B4-BE49-F238E27FC236}">
-                <a16:creationId xmlns:a16="http://schemas.microsoft.com/office/drawing/2014/main" id="{B9A67CE4-74EB-6347-AAAD-BA98D84CDF7A}"/>
-              </a:ext>
-            </a:extLst>
-          </p:cNvPr>
-          <p:cNvSpPr txBox="1"/>
-          <p:nvPr/>
-        </p:nvSpPr>
-        <p:spPr>
-          <a:xfrm>
-            <a:off x="0" y="4609070"/>
-            <a:ext cx="12191999" cy="1881925"/>
-          </a:xfrm>
-          <a:prstGeom prst="rect">
-            <a:avLst/>
-          </a:prstGeom>
-          <a:noFill/>
-        </p:spPr>
-        <p:txBody>
-          <a:bodyPr wrap="square" rtlCol="0">
-            <a:spAutoFit/>
-          </a:bodyPr>
-          <a:lstStyle/>
-          <a:p>
-            <a:pPr algn="ctr">
-              <a:lnSpc>
-                <a:spcPct val="150000"/>
-              </a:lnSpc>
-            </a:pPr>
-            <a:r>
-              <a:rPr lang="en-US" sz="2000" dirty="0">
-                <a:solidFill>
-                  <a:schemeClr val="tx1">
-                    <a:lumMod val="75000"/>
-                    <a:lumOff val="25000"/>
-                  </a:schemeClr>
-                </a:solidFill>
-              </a:rPr>
-              <a:t>Models give scores not predicted classes, and these are rarely probabilities</a:t>
-            </a:r>
-          </a:p>
-          <a:p>
-            <a:pPr algn="ctr">
-              <a:lnSpc>
-                <a:spcPct val="150000"/>
-              </a:lnSpc>
-            </a:pPr>
-            <a:r>
-              <a:rPr lang="en-US" sz="2000" dirty="0">
-                <a:solidFill>
-                  <a:schemeClr val="tx1">
-                    <a:lumMod val="75000"/>
-                    <a:lumOff val="25000"/>
-                  </a:schemeClr>
-                </a:solidFill>
-              </a:rPr>
-              <a:t>There’s no such thing as absolute accuracy, precision, or recall </a:t>
-            </a:r>
-          </a:p>
-          <a:p>
-            <a:pPr algn="ctr">
-              <a:lnSpc>
-                <a:spcPct val="150000"/>
-              </a:lnSpc>
-            </a:pPr>
-            <a:r>
-              <a:rPr lang="en-US" sz="2000" dirty="0">
-                <a:solidFill>
-                  <a:schemeClr val="tx1">
-                    <a:lumMod val="75000"/>
-                    <a:lumOff val="25000"/>
-                  </a:schemeClr>
-                </a:solidFill>
-              </a:rPr>
-              <a:t>A 0.5 score threshold is almost never what you want</a:t>
-            </a:r>
-          </a:p>
-          <a:p>
-            <a:pPr algn="ctr">
-              <a:lnSpc>
-                <a:spcPct val="150000"/>
-              </a:lnSpc>
-            </a:pPr>
-            <a:r>
-              <a:rPr lang="en-US" sz="2000" dirty="0">
-                <a:solidFill>
-                  <a:schemeClr val="tx1">
-                    <a:lumMod val="75000"/>
-                    <a:lumOff val="25000"/>
-                  </a:schemeClr>
-                </a:solidFill>
-              </a:rPr>
-              <a:t>Hyperparameters matter and defaults in many packages aren’t great</a:t>
-            </a:r>
-          </a:p>
-        </p:txBody>
-      </p:sp>
-    </p:spTree>
-    <p:extLst>
-      <p:ext uri="{BB962C8B-B14F-4D97-AF65-F5344CB8AC3E}">
-        <p14:creationId xmlns:p14="http://schemas.microsoft.com/office/powerpoint/2010/main" val="891097527"/>
       </p:ext>
     </p:extLst>
   </p:cSld>
